--- a/AI-tools/AI-Talk-LessTechnical/AI-2-Types.pptx
+++ b/AI-tools/AI-Talk-LessTechnical/AI-2-Types.pptx
@@ -220,7 +220,7 @@
           <a:p>
             <a:fld id="{7BAEECA8-D063-486F-AE31-5020270C1449}" type="datetimeFigureOut">
               <a:rPr lang="en-US" smtClean="0"/>
-              <a:t>5/14/2026</a:t>
+              <a:t>5/24/2026</a:t>
             </a:fld>
             <a:endParaRPr lang="en-US"/>
           </a:p>
@@ -397,7 +397,7 @@
           <a:p>
             <a:fld id="{CB233BD1-3BA8-448D-9D08-7846095EA517}" type="datetimeFigureOut">
               <a:rPr lang="en-US" smtClean="0"/>
-              <a:t>5/14/2026</a:t>
+              <a:t>5/24/2026</a:t>
             </a:fld>
             <a:endParaRPr lang="en-US"/>
           </a:p>
@@ -811,7 +811,7 @@
           <a:p>
             <a:fld id="{6383FAE1-13DE-4511-8C1B-C8AFB720664C}" type="datetimeFigureOut">
               <a:rPr lang="en-US" smtClean="0"/>
-              <a:t>5/14/2026</a:t>
+              <a:t>5/24/2026</a:t>
             </a:fld>
             <a:endParaRPr lang="en-US"/>
           </a:p>
@@ -1009,7 +1009,7 @@
           <a:p>
             <a:fld id="{6383FAE1-13DE-4511-8C1B-C8AFB720664C}" type="datetimeFigureOut">
               <a:rPr lang="en-US" smtClean="0"/>
-              <a:t>5/14/2026</a:t>
+              <a:t>5/24/2026</a:t>
             </a:fld>
             <a:endParaRPr lang="en-US"/>
           </a:p>
@@ -1217,7 +1217,7 @@
           <a:p>
             <a:fld id="{6383FAE1-13DE-4511-8C1B-C8AFB720664C}" type="datetimeFigureOut">
               <a:rPr lang="en-US" smtClean="0"/>
-              <a:t>5/14/2026</a:t>
+              <a:t>5/24/2026</a:t>
             </a:fld>
             <a:endParaRPr lang="en-US"/>
           </a:p>
@@ -1415,7 +1415,7 @@
           <a:p>
             <a:fld id="{6383FAE1-13DE-4511-8C1B-C8AFB720664C}" type="datetimeFigureOut">
               <a:rPr lang="en-US" smtClean="0"/>
-              <a:t>5/14/2026</a:t>
+              <a:t>5/24/2026</a:t>
             </a:fld>
             <a:endParaRPr lang="en-US"/>
           </a:p>
@@ -1690,7 +1690,7 @@
           <a:p>
             <a:fld id="{6383FAE1-13DE-4511-8C1B-C8AFB720664C}" type="datetimeFigureOut">
               <a:rPr lang="en-US" smtClean="0"/>
-              <a:t>5/14/2026</a:t>
+              <a:t>5/24/2026</a:t>
             </a:fld>
             <a:endParaRPr lang="en-US"/>
           </a:p>
@@ -1955,7 +1955,7 @@
           <a:p>
             <a:fld id="{6383FAE1-13DE-4511-8C1B-C8AFB720664C}" type="datetimeFigureOut">
               <a:rPr lang="en-US" smtClean="0"/>
-              <a:t>5/14/2026</a:t>
+              <a:t>5/24/2026</a:t>
             </a:fld>
             <a:endParaRPr lang="en-US"/>
           </a:p>
@@ -2367,7 +2367,7 @@
           <a:p>
             <a:fld id="{6383FAE1-13DE-4511-8C1B-C8AFB720664C}" type="datetimeFigureOut">
               <a:rPr lang="en-US" smtClean="0"/>
-              <a:t>5/14/2026</a:t>
+              <a:t>5/24/2026</a:t>
             </a:fld>
             <a:endParaRPr lang="en-US"/>
           </a:p>
@@ -2508,7 +2508,7 @@
           <a:p>
             <a:fld id="{6383FAE1-13DE-4511-8C1B-C8AFB720664C}" type="datetimeFigureOut">
               <a:rPr lang="en-US" smtClean="0"/>
-              <a:t>5/14/2026</a:t>
+              <a:t>5/24/2026</a:t>
             </a:fld>
             <a:endParaRPr lang="en-US"/>
           </a:p>
@@ -2621,7 +2621,7 @@
           <a:p>
             <a:fld id="{6383FAE1-13DE-4511-8C1B-C8AFB720664C}" type="datetimeFigureOut">
               <a:rPr lang="en-US" smtClean="0"/>
-              <a:t>5/14/2026</a:t>
+              <a:t>5/24/2026</a:t>
             </a:fld>
             <a:endParaRPr lang="en-US"/>
           </a:p>
@@ -2932,7 +2932,7 @@
           <a:p>
             <a:fld id="{6383FAE1-13DE-4511-8C1B-C8AFB720664C}" type="datetimeFigureOut">
               <a:rPr lang="en-US" smtClean="0"/>
-              <a:t>5/14/2026</a:t>
+              <a:t>5/24/2026</a:t>
             </a:fld>
             <a:endParaRPr lang="en-US"/>
           </a:p>
@@ -3223,7 +3223,7 @@
           <a:p>
             <a:fld id="{6383FAE1-13DE-4511-8C1B-C8AFB720664C}" type="datetimeFigureOut">
               <a:rPr lang="en-US" smtClean="0"/>
-              <a:t>5/14/2026</a:t>
+              <a:t>5/24/2026</a:t>
             </a:fld>
             <a:endParaRPr lang="en-US"/>
           </a:p>
@@ -3467,7 +3467,7 @@
           <a:p>
             <a:fld id="{6383FAE1-13DE-4511-8C1B-C8AFB720664C}" type="datetimeFigureOut">
               <a:rPr lang="en-US" smtClean="0"/>
-              <a:t>5/14/2026</a:t>
+              <a:t>5/24/2026</a:t>
             </a:fld>
             <a:endParaRPr lang="en-US"/>
           </a:p>
@@ -4401,7 +4401,7 @@
         <p:spPr>
           <a:xfrm>
             <a:off x="320040" y="166401"/>
-            <a:ext cx="11402568" cy="5262979"/>
+            <a:ext cx="11402568" cy="6001643"/>
           </a:xfrm>
           <a:prstGeom prst="rect">
             <a:avLst/>
@@ -4548,8 +4548,58 @@
                   </a:schemeClr>
                 </a:solidFill>
               </a:rPr>
-              <a:t> for each one. For example, it could play chess, compose music, conduct scientific research, and interpret human emotions—all with the same underlying intelligence. </a:t>
-            </a:r>
+              <a:t> for each one. </a:t>
+            </a:r>
+          </a:p>
+          <a:p>
+            <a:pPr lvl="0"/>
+            <a:endParaRPr lang="en-IN" sz="2400" dirty="0">
+              <a:solidFill>
+                <a:schemeClr val="accent6">
+                  <a:lumMod val="40000"/>
+                  <a:lumOff val="60000"/>
+                </a:schemeClr>
+              </a:solidFill>
+            </a:endParaRPr>
+          </a:p>
+          <a:p>
+            <a:pPr lvl="0"/>
+            <a:r>
+              <a:rPr lang="en-IN" sz="2400" dirty="0">
+                <a:solidFill>
+                  <a:schemeClr val="accent6">
+                    <a:lumMod val="40000"/>
+                    <a:lumOff val="60000"/>
+                  </a:schemeClr>
+                </a:solidFill>
+              </a:rPr>
+              <a:t>For example, it could </a:t>
+            </a:r>
+            <a:r>
+              <a:rPr lang="en-IN" sz="2400" b="1" dirty="0">
+                <a:solidFill>
+                  <a:schemeClr val="accent6">
+                    <a:lumMod val="40000"/>
+                    <a:lumOff val="60000"/>
+                  </a:schemeClr>
+                </a:solidFill>
+              </a:rPr>
+              <a:t>play chess, compose music, conduct scientific research, and interpret human emotions</a:t>
+            </a:r>
+            <a:r>
+              <a:rPr lang="en-IN" sz="2400" dirty="0">
+                <a:solidFill>
+                  <a:schemeClr val="accent6">
+                    <a:lumMod val="40000"/>
+                    <a:lumOff val="60000"/>
+                  </a:schemeClr>
+                </a:solidFill>
+              </a:rPr>
+              <a:t>—all with the same underlying intelligence. </a:t>
+            </a:r>
+          </a:p>
+          <a:p>
+            <a:pPr lvl="0"/>
             <a:endParaRPr lang="en-US" sz="2400" dirty="0">
               <a:solidFill>
                 <a:schemeClr val="accent6">
@@ -4820,7 +4870,7 @@
         <p:spPr>
           <a:xfrm>
             <a:off x="320040" y="166401"/>
-            <a:ext cx="11402568" cy="6370975"/>
+            <a:ext cx="11402568" cy="6001643"/>
           </a:xfrm>
           <a:prstGeom prst="rect">
             <a:avLst/>
@@ -4867,10 +4917,6 @@
             </a:endParaRPr>
           </a:p>
           <a:p>
-            <a:pPr marL="342900" indent="-342900">
-              <a:buFont typeface="Arial" panose="020B0604020202020204" pitchFamily="34" charset="0"/>
-              <a:buChar char="•"/>
-            </a:pPr>
             <a:r>
               <a:rPr lang="en-IN" sz="2400" dirty="0">
                 <a:solidFill>
@@ -4911,7 +4957,62 @@
                   </a:schemeClr>
                 </a:solidFill>
               </a:rPr>
-              <a:t>ASI could solve complex problems, make predictions with high accuracy, and understand intricate systems better than any human expert.</a:t>
+              <a:t>ASI could </a:t>
+            </a:r>
+            <a:r>
+              <a:rPr lang="en-US" sz="2400" b="1" i="1" dirty="0">
+                <a:solidFill>
+                  <a:schemeClr val="accent6">
+                    <a:lumMod val="40000"/>
+                    <a:lumOff val="60000"/>
+                  </a:schemeClr>
+                </a:solidFill>
+              </a:rPr>
+              <a:t>solve complex problems</a:t>
+            </a:r>
+            <a:r>
+              <a:rPr lang="en-US" sz="2400" dirty="0">
+                <a:solidFill>
+                  <a:schemeClr val="accent6">
+                    <a:lumMod val="40000"/>
+                    <a:lumOff val="60000"/>
+                  </a:schemeClr>
+                </a:solidFill>
+              </a:rPr>
+              <a:t>, </a:t>
+            </a:r>
+            <a:r>
+              <a:rPr lang="en-US" sz="2400">
+                <a:solidFill>
+                  <a:schemeClr val="accent6">
+                    <a:lumMod val="40000"/>
+                    <a:lumOff val="60000"/>
+                  </a:schemeClr>
+                </a:solidFill>
+              </a:rPr>
+              <a:t>and </a:t>
+            </a:r>
+            <a:r>
+              <a:rPr lang="en-US" sz="2400" b="1" i="1">
+                <a:solidFill>
+                  <a:schemeClr val="accent6">
+                    <a:lumMod val="40000"/>
+                    <a:lumOff val="60000"/>
+                  </a:schemeClr>
+                </a:solidFill>
+              </a:rPr>
+              <a:t>make </a:t>
+            </a:r>
+            <a:r>
+              <a:rPr lang="en-US" sz="2400" b="1" i="1" dirty="0">
+                <a:solidFill>
+                  <a:schemeClr val="accent6">
+                    <a:lumMod val="40000"/>
+                    <a:lumOff val="60000"/>
+                  </a:schemeClr>
+                </a:solidFill>
+              </a:rPr>
+              <a:t>predictions with high accuracy.</a:t>
             </a:r>
           </a:p>
           <a:p>
@@ -4945,7 +5046,7 @@
               <a:t>ASI would autonomously </a:t>
             </a:r>
             <a:r>
-              <a:rPr lang="en-US" sz="2400" b="1" dirty="0">
+              <a:rPr lang="en-US" sz="2400" b="1" i="1" dirty="0">
                 <a:solidFill>
                   <a:schemeClr val="accent6">
                     <a:lumMod val="40000"/>
@@ -4995,7 +5096,29 @@
                   </a:schemeClr>
                 </a:solidFill>
               </a:rPr>
-              <a:t>ASI would understand and interpret human emotions, social cues, and cultural contexts, enabling it to interact seamlessly with humans.</a:t>
+              <a:t>ASI would understand and </a:t>
+            </a:r>
+            <a:r>
+              <a:rPr lang="en-US" sz="2400" b="1" i="1" dirty="0">
+                <a:solidFill>
+                  <a:schemeClr val="accent6">
+                    <a:lumMod val="40000"/>
+                    <a:lumOff val="60000"/>
+                  </a:schemeClr>
+                </a:solidFill>
+              </a:rPr>
+              <a:t>interpret human emotions, social cues, and cultural contexts</a:t>
+            </a:r>
+            <a:r>
+              <a:rPr lang="en-US" sz="2400" dirty="0">
+                <a:solidFill>
+                  <a:schemeClr val="accent6">
+                    <a:lumMod val="40000"/>
+                    <a:lumOff val="60000"/>
+                  </a:schemeClr>
+                </a:solidFill>
+              </a:rPr>
+              <a:t>, enabling it to interact seamlessly with humans.</a:t>
             </a:r>
           </a:p>
           <a:p>
@@ -5029,6 +5152,17 @@
               <a:t>ASI would have virtually </a:t>
             </a:r>
             <a:r>
+              <a:rPr lang="en-US" sz="2400" b="1" i="1" dirty="0">
+                <a:solidFill>
+                  <a:schemeClr val="accent6">
+                    <a:lumMod val="40000"/>
+                    <a:lumOff val="60000"/>
+                  </a:schemeClr>
+                </a:solidFill>
+              </a:rPr>
+              <a:t>unlimited memory and processing capabilities</a:t>
+            </a:r>
+            <a:r>
               <a:rPr lang="en-US" sz="2400" b="1" dirty="0">
                 <a:solidFill>
                   <a:schemeClr val="accent6">
@@ -5037,7 +5171,7 @@
                   </a:schemeClr>
                 </a:solidFill>
               </a:rPr>
-              <a:t>unlimited memory and processing capabilities,</a:t>
+              <a:t>,</a:t>
             </a:r>
             <a:r>
               <a:rPr lang="en-US" sz="2400" dirty="0">
@@ -5048,27 +5182,8 @@
                   </a:schemeClr>
                 </a:solidFill>
               </a:rPr>
-              <a:t> allowing it to analyze vast amounts of data and perform complex computations at unprecedented </a:t>
-            </a:r>
-            <a:r>
-              <a:rPr lang="en-US" sz="2400">
-                <a:solidFill>
-                  <a:schemeClr val="accent6">
-                    <a:lumMod val="40000"/>
-                    <a:lumOff val="60000"/>
-                  </a:schemeClr>
-                </a:solidFill>
-              </a:rPr>
-              <a:t>speeds.</a:t>
-            </a:r>
-            <a:endParaRPr lang="en-US" sz="2400" dirty="0">
-              <a:solidFill>
-                <a:schemeClr val="accent6">
-                  <a:lumMod val="40000"/>
-                  <a:lumOff val="60000"/>
-                </a:schemeClr>
-              </a:solidFill>
-            </a:endParaRPr>
+              <a:t> allowing it to analyze vast amounts of data and perform complex computations at unprecedented speeds.</a:t>
+            </a:r>
           </a:p>
         </p:txBody>
       </p:sp>

--- a/AI-tools/AI-Talk-LessTechnical/AI-2-Types.pptx
+++ b/AI-tools/AI-Talk-LessTechnical/AI-2-Types.pptx
@@ -5,18 +5,17 @@
     <p:sldMasterId id="2147483648" r:id="rId1"/>
   </p:sldMasterIdLst>
   <p:notesMasterIdLst>
-    <p:notesMasterId r:id="rId8"/>
+    <p:notesMasterId r:id="rId7"/>
   </p:notesMasterIdLst>
   <p:handoutMasterIdLst>
-    <p:handoutMasterId r:id="rId9"/>
+    <p:handoutMasterId r:id="rId8"/>
   </p:handoutMasterIdLst>
   <p:sldIdLst>
     <p:sldId id="276" r:id="rId2"/>
     <p:sldId id="277" r:id="rId3"/>
     <p:sldId id="279" r:id="rId4"/>
-    <p:sldId id="280" r:id="rId5"/>
-    <p:sldId id="281" r:id="rId6"/>
-    <p:sldId id="278" r:id="rId7"/>
+    <p:sldId id="281" r:id="rId5"/>
+    <p:sldId id="278" r:id="rId6"/>
   </p:sldIdLst>
   <p:sldSz cx="12192000" cy="6858000"/>
   <p:notesSz cx="6858000" cy="9144000"/>
@@ -220,7 +219,7 @@
           <a:p>
             <a:fld id="{7BAEECA8-D063-486F-AE31-5020270C1449}" type="datetimeFigureOut">
               <a:rPr lang="en-US" smtClean="0"/>
-              <a:t>5/24/2026</a:t>
+              <a:t>5/27/2026</a:t>
             </a:fld>
             <a:endParaRPr lang="en-US"/>
           </a:p>
@@ -397,7 +396,7 @@
           <a:p>
             <a:fld id="{CB233BD1-3BA8-448D-9D08-7846095EA517}" type="datetimeFigureOut">
               <a:rPr lang="en-US" smtClean="0"/>
-              <a:t>5/24/2026</a:t>
+              <a:t>5/27/2026</a:t>
             </a:fld>
             <a:endParaRPr lang="en-US"/>
           </a:p>
@@ -811,7 +810,7 @@
           <a:p>
             <a:fld id="{6383FAE1-13DE-4511-8C1B-C8AFB720664C}" type="datetimeFigureOut">
               <a:rPr lang="en-US" smtClean="0"/>
-              <a:t>5/24/2026</a:t>
+              <a:t>5/27/2026</a:t>
             </a:fld>
             <a:endParaRPr lang="en-US"/>
           </a:p>
@@ -1009,7 +1008,7 @@
           <a:p>
             <a:fld id="{6383FAE1-13DE-4511-8C1B-C8AFB720664C}" type="datetimeFigureOut">
               <a:rPr lang="en-US" smtClean="0"/>
-              <a:t>5/24/2026</a:t>
+              <a:t>5/27/2026</a:t>
             </a:fld>
             <a:endParaRPr lang="en-US"/>
           </a:p>
@@ -1217,7 +1216,7 @@
           <a:p>
             <a:fld id="{6383FAE1-13DE-4511-8C1B-C8AFB720664C}" type="datetimeFigureOut">
               <a:rPr lang="en-US" smtClean="0"/>
-              <a:t>5/24/2026</a:t>
+              <a:t>5/27/2026</a:t>
             </a:fld>
             <a:endParaRPr lang="en-US"/>
           </a:p>
@@ -1415,7 +1414,7 @@
           <a:p>
             <a:fld id="{6383FAE1-13DE-4511-8C1B-C8AFB720664C}" type="datetimeFigureOut">
               <a:rPr lang="en-US" smtClean="0"/>
-              <a:t>5/24/2026</a:t>
+              <a:t>5/27/2026</a:t>
             </a:fld>
             <a:endParaRPr lang="en-US"/>
           </a:p>
@@ -1690,7 +1689,7 @@
           <a:p>
             <a:fld id="{6383FAE1-13DE-4511-8C1B-C8AFB720664C}" type="datetimeFigureOut">
               <a:rPr lang="en-US" smtClean="0"/>
-              <a:t>5/24/2026</a:t>
+              <a:t>5/27/2026</a:t>
             </a:fld>
             <a:endParaRPr lang="en-US"/>
           </a:p>
@@ -1955,7 +1954,7 @@
           <a:p>
             <a:fld id="{6383FAE1-13DE-4511-8C1B-C8AFB720664C}" type="datetimeFigureOut">
               <a:rPr lang="en-US" smtClean="0"/>
-              <a:t>5/24/2026</a:t>
+              <a:t>5/27/2026</a:t>
             </a:fld>
             <a:endParaRPr lang="en-US"/>
           </a:p>
@@ -2367,7 +2366,7 @@
           <a:p>
             <a:fld id="{6383FAE1-13DE-4511-8C1B-C8AFB720664C}" type="datetimeFigureOut">
               <a:rPr lang="en-US" smtClean="0"/>
-              <a:t>5/24/2026</a:t>
+              <a:t>5/27/2026</a:t>
             </a:fld>
             <a:endParaRPr lang="en-US"/>
           </a:p>
@@ -2508,7 +2507,7 @@
           <a:p>
             <a:fld id="{6383FAE1-13DE-4511-8C1B-C8AFB720664C}" type="datetimeFigureOut">
               <a:rPr lang="en-US" smtClean="0"/>
-              <a:t>5/24/2026</a:t>
+              <a:t>5/27/2026</a:t>
             </a:fld>
             <a:endParaRPr lang="en-US"/>
           </a:p>
@@ -2621,7 +2620,7 @@
           <a:p>
             <a:fld id="{6383FAE1-13DE-4511-8C1B-C8AFB720664C}" type="datetimeFigureOut">
               <a:rPr lang="en-US" smtClean="0"/>
-              <a:t>5/24/2026</a:t>
+              <a:t>5/27/2026</a:t>
             </a:fld>
             <a:endParaRPr lang="en-US"/>
           </a:p>
@@ -2932,7 +2931,7 @@
           <a:p>
             <a:fld id="{6383FAE1-13DE-4511-8C1B-C8AFB720664C}" type="datetimeFigureOut">
               <a:rPr lang="en-US" smtClean="0"/>
-              <a:t>5/24/2026</a:t>
+              <a:t>5/27/2026</a:t>
             </a:fld>
             <a:endParaRPr lang="en-US"/>
           </a:p>
@@ -3223,7 +3222,7 @@
           <a:p>
             <a:fld id="{6383FAE1-13DE-4511-8C1B-C8AFB720664C}" type="datetimeFigureOut">
               <a:rPr lang="en-US" smtClean="0"/>
-              <a:t>5/24/2026</a:t>
+              <a:t>5/27/2026</a:t>
             </a:fld>
             <a:endParaRPr lang="en-US"/>
           </a:p>
@@ -3467,7 +3466,7 @@
           <a:p>
             <a:fld id="{6383FAE1-13DE-4511-8C1B-C8AFB720664C}" type="datetimeFigureOut">
               <a:rPr lang="en-US" smtClean="0"/>
-              <a:t>5/24/2026</a:t>
+              <a:t>5/27/2026</a:t>
             </a:fld>
             <a:endParaRPr lang="en-US"/>
           </a:p>
@@ -4128,7 +4127,7 @@
         <p:spPr>
           <a:xfrm>
             <a:off x="320040" y="166401"/>
-            <a:ext cx="11402568" cy="3251403"/>
+            <a:ext cx="11402568" cy="4847289"/>
           </a:xfrm>
           <a:prstGeom prst="rect">
             <a:avLst/>
@@ -4202,7 +4201,67 @@
                 <a:ea typeface="Times New Roman" panose="02020603050405020304" pitchFamily="18" charset="0"/>
                 <a:cs typeface="Calibri" panose="020F0502020204030204" pitchFamily="34" charset="0"/>
               </a:rPr>
-              <a:t>This type of AI is designed to perform a specific task and lacks the ability to learn or generalize to other tasks.</a:t>
+              <a:t>This type of AI is designed to </a:t>
+            </a:r>
+            <a:r>
+              <a:rPr lang="en-IN" sz="2400" b="1" dirty="0">
+                <a:solidFill>
+                  <a:schemeClr val="accent6">
+                    <a:lumMod val="40000"/>
+                    <a:lumOff val="60000"/>
+                  </a:schemeClr>
+                </a:solidFill>
+                <a:effectLst/>
+                <a:latin typeface="Calibri" panose="020F0502020204030204" pitchFamily="34" charset="0"/>
+                <a:ea typeface="Times New Roman" panose="02020603050405020304" pitchFamily="18" charset="0"/>
+                <a:cs typeface="Calibri" panose="020F0502020204030204" pitchFamily="34" charset="0"/>
+              </a:rPr>
+              <a:t>perform a specific task </a:t>
+            </a:r>
+            <a:r>
+              <a:rPr lang="en-IN" sz="2400" dirty="0">
+                <a:solidFill>
+                  <a:schemeClr val="accent6">
+                    <a:lumMod val="40000"/>
+                    <a:lumOff val="60000"/>
+                  </a:schemeClr>
+                </a:solidFill>
+                <a:effectLst/>
+                <a:latin typeface="Calibri" panose="020F0502020204030204" pitchFamily="34" charset="0"/>
+                <a:ea typeface="Times New Roman" panose="02020603050405020304" pitchFamily="18" charset="0"/>
+                <a:cs typeface="Calibri" panose="020F0502020204030204" pitchFamily="34" charset="0"/>
+              </a:rPr>
+              <a:t>and </a:t>
+            </a:r>
+            <a:r>
+              <a:rPr lang="en-IN" sz="2400" b="1" dirty="0">
+                <a:solidFill>
+                  <a:schemeClr val="accent6">
+                    <a:lumMod val="40000"/>
+                    <a:lumOff val="60000"/>
+                  </a:schemeClr>
+                </a:solidFill>
+                <a:effectLst/>
+                <a:latin typeface="Calibri" panose="020F0502020204030204" pitchFamily="34" charset="0"/>
+                <a:ea typeface="Times New Roman" panose="02020603050405020304" pitchFamily="18" charset="0"/>
+                <a:cs typeface="Calibri" panose="020F0502020204030204" pitchFamily="34" charset="0"/>
+              </a:rPr>
+              <a:t>lacks the ability to learn </a:t>
+            </a:r>
+            <a:r>
+              <a:rPr lang="en-IN" sz="2400" dirty="0">
+                <a:solidFill>
+                  <a:schemeClr val="accent6">
+                    <a:lumMod val="40000"/>
+                    <a:lumOff val="60000"/>
+                  </a:schemeClr>
+                </a:solidFill>
+                <a:effectLst/>
+                <a:latin typeface="Calibri" panose="020F0502020204030204" pitchFamily="34" charset="0"/>
+                <a:ea typeface="Times New Roman" panose="02020603050405020304" pitchFamily="18" charset="0"/>
+                <a:cs typeface="Calibri" panose="020F0502020204030204" pitchFamily="34" charset="0"/>
+              </a:rPr>
+              <a:t>or generalize to other tasks.</a:t>
             </a:r>
           </a:p>
           <a:p>
@@ -4250,7 +4309,88 @@
                 <a:ea typeface="Times New Roman" panose="02020603050405020304" pitchFamily="18" charset="0"/>
                 <a:cs typeface="Calibri" panose="020F0502020204030204" pitchFamily="34" charset="0"/>
               </a:rPr>
-              <a:t> Examples include facial recognition software, virtual assistants (like Siri or Alexa), and spam filters.</a:t>
+              <a:t> Examples include </a:t>
+            </a:r>
+          </a:p>
+          <a:p>
+            <a:pPr marL="342900" marR="0" indent="-342900">
+              <a:lnSpc>
+                <a:spcPct val="107000"/>
+              </a:lnSpc>
+              <a:spcAft>
+                <a:spcPts val="800"/>
+              </a:spcAft>
+              <a:buFont typeface="Arial" panose="020B0604020202020204" pitchFamily="34" charset="0"/>
+              <a:buChar char="•"/>
+            </a:pPr>
+            <a:r>
+              <a:rPr lang="en-IN" sz="2400" dirty="0">
+                <a:solidFill>
+                  <a:schemeClr val="accent6">
+                    <a:lumMod val="40000"/>
+                    <a:lumOff val="60000"/>
+                  </a:schemeClr>
+                </a:solidFill>
+                <a:effectLst/>
+                <a:latin typeface="Calibri" panose="020F0502020204030204" pitchFamily="34" charset="0"/>
+                <a:ea typeface="Times New Roman" panose="02020603050405020304" pitchFamily="18" charset="0"/>
+                <a:cs typeface="Calibri" panose="020F0502020204030204" pitchFamily="34" charset="0"/>
+              </a:rPr>
+              <a:t>facial recognition software, </a:t>
+            </a:r>
+          </a:p>
+          <a:p>
+            <a:pPr marL="342900" marR="0" indent="-342900">
+              <a:lnSpc>
+                <a:spcPct val="107000"/>
+              </a:lnSpc>
+              <a:spcAft>
+                <a:spcPts val="800"/>
+              </a:spcAft>
+              <a:buFont typeface="Arial" panose="020B0604020202020204" pitchFamily="34" charset="0"/>
+              <a:buChar char="•"/>
+            </a:pPr>
+            <a:r>
+              <a:rPr lang="en-IN" sz="2400" dirty="0">
+                <a:solidFill>
+                  <a:schemeClr val="accent6">
+                    <a:lumMod val="40000"/>
+                    <a:lumOff val="60000"/>
+                  </a:schemeClr>
+                </a:solidFill>
+                <a:effectLst/>
+                <a:latin typeface="Calibri" panose="020F0502020204030204" pitchFamily="34" charset="0"/>
+                <a:ea typeface="Times New Roman" panose="02020603050405020304" pitchFamily="18" charset="0"/>
+                <a:cs typeface="Calibri" panose="020F0502020204030204" pitchFamily="34" charset="0"/>
+              </a:rPr>
+              <a:t>virtual assistants (like Siri or Alexa), and </a:t>
+            </a:r>
+          </a:p>
+          <a:p>
+            <a:pPr marL="342900" marR="0" indent="-342900">
+              <a:lnSpc>
+                <a:spcPct val="107000"/>
+              </a:lnSpc>
+              <a:spcAft>
+                <a:spcPts val="800"/>
+              </a:spcAft>
+              <a:buFont typeface="Arial" panose="020B0604020202020204" pitchFamily="34" charset="0"/>
+              <a:buChar char="•"/>
+            </a:pPr>
+            <a:r>
+              <a:rPr lang="en-IN" sz="2400" dirty="0">
+                <a:solidFill>
+                  <a:schemeClr val="accent6">
+                    <a:lumMod val="40000"/>
+                    <a:lumOff val="60000"/>
+                  </a:schemeClr>
+                </a:solidFill>
+                <a:effectLst/>
+                <a:latin typeface="Calibri" panose="020F0502020204030204" pitchFamily="34" charset="0"/>
+                <a:ea typeface="Times New Roman" panose="02020603050405020304" pitchFamily="18" charset="0"/>
+                <a:cs typeface="Calibri" panose="020F0502020204030204" pitchFamily="34" charset="0"/>
+              </a:rPr>
+              <a:t>spam filters.</a:t>
             </a:r>
             <a:r>
               <a:rPr lang="en-IN" sz="2400" b="1" dirty="0">
@@ -4267,6 +4407,17 @@
               </a:rPr>
               <a:t> </a:t>
             </a:r>
+          </a:p>
+          <a:p>
+            <a:pPr marL="0" marR="0">
+              <a:lnSpc>
+                <a:spcPct val="107000"/>
+              </a:lnSpc>
+              <a:spcAft>
+                <a:spcPts val="800"/>
+              </a:spcAft>
+              <a:buNone/>
+            </a:pPr>
             <a:endParaRPr lang="en-US" sz="2400" dirty="0">
               <a:solidFill>
                 <a:schemeClr val="accent6">
@@ -4687,159 +4838,6 @@
         <p:cNvPr id="1" name="">
           <a:extLst>
             <a:ext uri="{FF2B5EF4-FFF2-40B4-BE49-F238E27FC236}">
-              <a16:creationId xmlns:a16="http://schemas.microsoft.com/office/drawing/2014/main" id="{787F431C-8F14-DAF3-7682-31475791091C}"/>
-            </a:ext>
-          </a:extLst>
-        </p:cNvPr>
-        <p:cNvGrpSpPr/>
-        <p:nvPr/>
-      </p:nvGrpSpPr>
-      <p:grpSpPr>
-        <a:xfrm>
-          <a:off x="0" y="0"/>
-          <a:ext cx="0" cy="0"/>
-          <a:chOff x="0" y="0"/>
-          <a:chExt cx="0" cy="0"/>
-        </a:xfrm>
-      </p:grpSpPr>
-      <p:sp>
-        <p:nvSpPr>
-          <p:cNvPr id="3" name="TextBox 2">
-            <a:extLst>
-              <a:ext uri="{FF2B5EF4-FFF2-40B4-BE49-F238E27FC236}">
-                <a16:creationId xmlns:a16="http://schemas.microsoft.com/office/drawing/2014/main" id="{6173A375-6256-4A07-0C05-49D703A88695}"/>
-              </a:ext>
-            </a:extLst>
-          </p:cNvPr>
-          <p:cNvSpPr txBox="1"/>
-          <p:nvPr/>
-        </p:nvSpPr>
-        <p:spPr>
-          <a:xfrm>
-            <a:off x="320040" y="166401"/>
-            <a:ext cx="11402568" cy="2308324"/>
-          </a:xfrm>
-          <a:prstGeom prst="rect">
-            <a:avLst/>
-          </a:prstGeom>
-          <a:noFill/>
-        </p:spPr>
-        <p:txBody>
-          <a:bodyPr wrap="square">
-            <a:spAutoFit/>
-          </a:bodyPr>
-          <a:lstStyle/>
-          <a:p>
-            <a:r>
-              <a:rPr lang="en-IN" sz="2400" b="1" dirty="0">
-                <a:solidFill>
-                  <a:schemeClr val="accent6">
-                    <a:lumMod val="40000"/>
-                    <a:lumOff val="60000"/>
-                  </a:schemeClr>
-                </a:solidFill>
-              </a:rPr>
-              <a:t>Example: IBM Watson: Multidomain Reasoning </a:t>
-            </a:r>
-          </a:p>
-          <a:p>
-            <a:endParaRPr lang="en-IN" sz="2400" b="1" dirty="0">
-              <a:solidFill>
-                <a:schemeClr val="accent6">
-                  <a:lumMod val="40000"/>
-                  <a:lumOff val="60000"/>
-                </a:schemeClr>
-              </a:solidFill>
-            </a:endParaRPr>
-          </a:p>
-          <a:p>
-            <a:r>
-              <a:rPr lang="en-IN" sz="2400" dirty="0">
-                <a:solidFill>
-                  <a:schemeClr val="accent6">
-                    <a:lumMod val="40000"/>
-                    <a:lumOff val="60000"/>
-                  </a:schemeClr>
-                </a:solidFill>
-              </a:rPr>
-              <a:t>IBM's Watson gained prominence by winning the quiz show </a:t>
-            </a:r>
-            <a:r>
-              <a:rPr lang="en-IN" sz="2400" i="1" dirty="0">
-                <a:solidFill>
-                  <a:schemeClr val="accent6">
-                    <a:lumMod val="40000"/>
-                    <a:lumOff val="60000"/>
-                  </a:schemeClr>
-                </a:solidFill>
-              </a:rPr>
-              <a:t>Jeopardy!</a:t>
-            </a:r>
-            <a:r>
-              <a:rPr lang="en-IN" sz="2400" dirty="0">
-                <a:solidFill>
-                  <a:schemeClr val="accent6">
-                    <a:lumMod val="40000"/>
-                    <a:lumOff val="60000"/>
-                  </a:schemeClr>
-                </a:solidFill>
-              </a:rPr>
-              <a:t>, showcasing its ability to process and understand natural language. Beyond entertainment, Watson has been applied in healthcare, where it </a:t>
-            </a:r>
-            <a:r>
-              <a:rPr lang="en-IN" sz="2400" dirty="0" err="1">
-                <a:solidFill>
-                  <a:schemeClr val="accent6">
-                    <a:lumMod val="40000"/>
-                    <a:lumOff val="60000"/>
-                  </a:schemeClr>
-                </a:solidFill>
-              </a:rPr>
-              <a:t>analyzes</a:t>
-            </a:r>
-            <a:r>
-              <a:rPr lang="en-IN" sz="2400" dirty="0">
-                <a:solidFill>
-                  <a:schemeClr val="accent6">
-                    <a:lumMod val="40000"/>
-                    <a:lumOff val="60000"/>
-                  </a:schemeClr>
-                </a:solidFill>
-              </a:rPr>
-              <a:t> vast datasets, including medical records and research papers, to assist doctors in diagnosing diseases and suggesting treatment plans. </a:t>
-            </a:r>
-            <a:endParaRPr lang="en-US" sz="2400" dirty="0">
-              <a:solidFill>
-                <a:schemeClr val="accent6">
-                  <a:lumMod val="40000"/>
-                  <a:lumOff val="60000"/>
-                </a:schemeClr>
-              </a:solidFill>
-            </a:endParaRPr>
-          </a:p>
-        </p:txBody>
-      </p:sp>
-    </p:spTree>
-    <p:extLst>
-      <p:ext uri="{BB962C8B-B14F-4D97-AF65-F5344CB8AC3E}">
-        <p14:creationId xmlns:p14="http://schemas.microsoft.com/office/powerpoint/2010/main" val="1654279264"/>
-      </p:ext>
-    </p:extLst>
-  </p:cSld>
-  <p:clrMapOvr>
-    <a:masterClrMapping/>
-  </p:clrMapOvr>
-</p:sld>
-</file>
-
-<file path=ppt/slides/slide5.xml><?xml version="1.0" encoding="utf-8"?>
-<p:sld xmlns:a="http://schemas.openxmlformats.org/drawingml/2006/main" xmlns:r="http://schemas.openxmlformats.org/officeDocument/2006/relationships" xmlns:p="http://schemas.openxmlformats.org/presentationml/2006/main">
-  <p:cSld>
-    <p:spTree>
-      <p:nvGrpSpPr>
-        <p:cNvPr id="1" name="">
-          <a:extLst>
-            <a:ext uri="{FF2B5EF4-FFF2-40B4-BE49-F238E27FC236}">
               <a16:creationId xmlns:a16="http://schemas.microsoft.com/office/drawing/2014/main" id="{84AFCBAA-8E60-1CDB-50CE-73B669A633C9}"/>
             </a:ext>
           </a:extLst>
@@ -5200,7 +5198,7 @@
 </p:sld>
 </file>
 
-<file path=ppt/slides/slide6.xml><?xml version="1.0" encoding="utf-8"?>
+<file path=ppt/slides/slide5.xml><?xml version="1.0" encoding="utf-8"?>
 <p:sld xmlns:a="http://schemas.openxmlformats.org/drawingml/2006/main" xmlns:r="http://schemas.openxmlformats.org/officeDocument/2006/relationships" xmlns:p="http://schemas.openxmlformats.org/presentationml/2006/main">
   <p:cSld>
     <p:spTree>
